--- a/decks/geog-economic-world/geog-economic-world_ch1_measuring-development.pptx
+++ b/decks/geog-economic-world/geog-economic-world_ch1_measuring-development.pptx
@@ -126,30 +126,30 @@
   <p:extLst>
     <p:ext uri="{521415D9-36F7-43E2-AB2F-B90AF26B5E84}">
       <p14:sectionLst xmlns:p14="http://schemas.microsoft.com/office/powerpoint/2010/main">
-        <p14:section name="Opening" id="{5da64ee0-846d-6b72-5aae-504d4466af19}">
+        <p14:section name="Opening" id="{75b41ac2-d958-97f6-a917-ac5ba070caf2}">
           <p14:sldIdLst>
             <p14:sldId id="256"/>
           </p14:sldIdLst>
         </p14:section>
-        <p14:section name="Gate" id="{98ee2deb-0d24-e574-277b-343e3a07f8f2}">
+        <p14:section name="Gate" id="{dde2e70b-6e24-4f41-19b8-7a2f35093f85}">
           <p14:sldIdLst>
             <p14:sldId id="257"/>
             <p14:sldId id="258"/>
           </p14:sldIdLst>
         </p14:section>
-        <p14:section name="Pre-teach" id="{03d83bdf-7815-81e5-2b35-5f087571cd81}">
+        <p14:section name="Pre-teach" id="{0550be5b-14b7-fa21-f519-dad6371e9988}">
           <p14:sldIdLst>
             <p14:sldId id="259"/>
             <p14:sldId id="260"/>
           </p14:sldIdLst>
         </p14:section>
-        <p14:section name="Read-along" id="{d1ed4e0c-c801-de5d-4c50-763123a170c2}">
+        <p14:section name="Read-along" id="{50499c5e-1a97-0a1a-1d12-4307409117e6}">
           <p14:sldIdLst>
             <p14:sldId id="261"/>
             <p14:sldId id="262"/>
           </p14:sldIdLst>
         </p14:section>
-        <p14:section name="Teach" id="{5fec66c7-b2fd-cdfd-69e0-e80d3ed41daa}">
+        <p14:section name="Teach" id="{8269490e-1aa8-55c3-d1a0-733d86f428d8}">
           <p14:sldIdLst>
             <p14:sldId id="263"/>
             <p14:sldId id="264"/>
@@ -158,7 +158,7 @@
             <p14:sldId id="267"/>
           </p14:sldIdLst>
         </p14:section>
-        <p14:section name="Routes" id="{6e13c135-493b-eb20-8c4d-81a89834fc05}">
+        <p14:section name="Routes" id="{904b366c-3bc6-7575-e966-dcfdac2a170a}">
           <p14:sldIdLst>
             <p14:sldId id="268"/>
             <p14:sldId id="269"/>
@@ -166,12 +166,12 @@
             <p14:sldId id="271"/>
           </p14:sldIdLst>
         </p14:section>
-        <p14:section name="Close" id="{c9004b8e-21f5-229f-caf3-d702214b7f07}">
+        <p14:section name="Close" id="{f2fa3183-a39f-61f9-6cb8-727abe1fb3a7}">
           <p14:sldIdLst>
             <p14:sldId id="272"/>
           </p14:sldIdLst>
         </p14:section>
-        <p14:section name="Answers" id="{842855da-63b6-c018-c1d0-c588c8a112ae}">
+        <p14:section name="Answers" id="{f9b8f55d-ee9f-f065-2dff-8b77a46860b9}">
           <p14:sldIdLst>
             <p14:sldId id="273"/>
             <p14:sldId id="274"/>
